--- a/design-history/bank_industry_presentation.pptx
+++ b/design-history/bank_industry_presentation.pptx
@@ -3207,6 +3207,9 @@
           </a:p>
           <a:p>
             <a:pPr>
+              <a:spcBef>
+                <a:spcPts val="4000"/>
+              </a:spcBef>
               <a:defRPr sz="2000">
                 <a:solidFill>
                   <a:srgbClr val="E6D0A4"/>
